--- a/submission/Debie_Galleros_Pillar5_CapstoneProject_BusinessDeck.pptx
+++ b/submission/Debie_Galleros_Pillar5_CapstoneProject_BusinessDeck.pptx
@@ -5404,7 +5404,7 @@
                 </a:solidFill>
                 <a:latin typeface="Arial"/>
               </a:rPr>
-              <a:t>The dress is placed on the shopper's own photo, scaled to their pose — picking a bigger size renders visibly bigger.</a:t>
+              <a:t>The sweater is placed on the shopper's own photo, scaled and angled to their pose — picking a bigger size renders visibly bigger.</a:t>
             </a:r>
           </a:p>
         </p:txBody>
@@ -5488,7 +5488,7 @@
                 </a:solidFill>
                 <a:latin typeface="Arial"/>
               </a:rPr>
-              <a:t>Plain words, no tailor talk: “the length falls just above your knee — a flattering, easy fit for you.”</a:t>
+              <a:t>Plain words, no tailor talk: “the length reaches your waist neatly, and the sleeves land well at your wrists.”</a:t>
             </a:r>
           </a:p>
         </p:txBody>

--- a/submission/Debie_Galleros_Pillar5_CapstoneProject_BusinessDeck.pptx
+++ b/submission/Debie_Galleros_Pillar5_CapstoneProject_BusinessDeck.pptx
@@ -3291,55 +3291,13 @@
       </p:sp>
       <p:sp>
         <p:nvSpPr>
-          <p:cNvPr id="7" name="TextBox 6"/>
-          <p:cNvSpPr txBox="1"/>
-          <p:nvPr/>
-        </p:nvSpPr>
-        <p:spPr>
-          <a:xfrm>
-            <a:off x="1097280" y="5047488"/>
-            <a:ext cx="9994392" cy="365760"/>
-          </a:xfrm>
-          <a:prstGeom prst="rect">
-            <a:avLst/>
-          </a:prstGeom>
-          <a:noFill/>
-        </p:spPr>
-        <p:txBody>
-          <a:bodyPr wrap="square" lIns="0" rIns="0" tIns="0" bIns="0">
-            <a:spAutoFit/>
-          </a:bodyPr>
-          <a:lstStyle/>
-          <a:p>
-            <a:pPr algn="ctr">
-              <a:lnSpc>
-                <a:spcPct val="106000"/>
-              </a:lnSpc>
-              <a:spcAft>
-                <a:spcPts val="600"/>
-              </a:spcAft>
-            </a:pPr>
-            <a:r>
-              <a:rPr sz="1250" b="0" i="0">
-                <a:solidFill>
-                  <a:srgbClr val="595959"/>
-                </a:solidFill>
-                <a:latin typeface="Arial"/>
-              </a:rPr>
-              <a:t>A virtual fitting room with size recommendations and tailored advice</a:t>
-            </a:r>
-          </a:p>
-        </p:txBody>
-      </p:sp>
-      <p:sp>
-        <p:nvSpPr>
           <p:cNvPr id="8" name="TextBox 7"/>
           <p:cNvSpPr txBox="1"/>
           <p:nvPr/>
         </p:nvSpPr>
         <p:spPr>
           <a:xfrm>
-            <a:off x="1097280" y="5989320"/>
+            <a:off x="1097280" y="5193792"/>
             <a:ext cx="9994392" cy="320040"/>
           </a:xfrm>
           <a:prstGeom prst="rect">

--- a/submission/Debie_Galleros_Pillar5_CapstoneProject_BusinessDeck.pptx
+++ b/submission/Debie_Galleros_Pillar5_CapstoneProject_BusinessDeck.pptx
@@ -3158,7 +3158,7 @@
                 </a:solidFill>
                 <a:latin typeface="Arial"/>
               </a:rPr>
-              <a:t>FitML: A Fairness-Audited Machine Learning System for Sizing and Augmented Reality Try-On in E-Commerce</a:t>
+              <a:t>FitML: A Fairness-Audited Machine Learning System for Sizing and Intelligent Virtual Try-On in E-Commerce</a:t>
             </a:r>
           </a:p>
         </p:txBody>
@@ -5530,7 +5530,7 @@
                 </a:solidFill>
                 <a:latin typeface="Arial"/>
               </a:rPr>
-              <a:t>The face is blurred before the photo is even saved — visible right in this screenshot.</a:t>
+              <a:t>Faces can be cropped out before the photo is ever saved; this screenshot shows the earlier blur-based safeguard instead.</a:t>
             </a:r>
           </a:p>
         </p:txBody>
@@ -7554,7 +7554,7 @@
                 </a:solidFill>
                 <a:latin typeface="Arial"/>
               </a:rPr>
-              <a:t>Faces blurred by default</a:t>
+              <a:t>Face privacy, opt-in and automatic</a:t>
             </a:r>
           </a:p>
         </p:txBody>
@@ -7596,7 +7596,7 @@
                 </a:solidFill>
                 <a:latin typeface="Arial"/>
               </a:rPr>
-              <a:t>The blur happens before the photo is first saved, so an unblurred photo never exists on the server unless the shopper opts in.</a:t>
+              <a:t>An opt-in checkbox crops your face out before saving. Left unchecked, FitML still protects you — your real face is restored over anything the AI drew in its place.</a:t>
             </a:r>
           </a:p>
         </p:txBody>
@@ -9339,7 +9339,7 @@
                 </a:solidFill>
                 <a:latin typeface="Arial"/>
               </a:rPr>
-              <a:t>Photorealistic try-on</a:t>
+              <a:t>Fit-accurate rendering</a:t>
             </a:r>
           </a:p>
         </p:txBody>
@@ -9381,7 +9381,7 @@
                 </a:solidFill>
                 <a:latin typeface="Arial"/>
               </a:rPr>
-              <a:t>New research data (the FIT dataset, 2026 — over a million fit-aware try-on examples) makes it possible to render how a specific size would actually drape and pull. Today's preview shows placement and proportion; this upgrade shows fit.</a:t>
+              <a:t>Today's generative try-on already shows the right garment on your own photo, photorealistically. The next step (the FIT dataset, 2026 — over a million fit-aware examples) renders how a specific size actually drapes and pulls, not just where it sits.</a:t>
             </a:r>
           </a:p>
         </p:txBody>

--- a/submission/Debie_Galleros_Pillar5_CapstoneProject_BusinessDeck.pptx
+++ b/submission/Debie_Galleros_Pillar5_CapstoneProject_BusinessDeck.pptx
@@ -5530,7 +5530,7 @@
                 </a:solidFill>
                 <a:latin typeface="Arial"/>
               </a:rPr>
-              <a:t>Faces can be cropped out before the photo is ever saved; this screenshot shows the earlier blur-based safeguard instead.</a:t>
+              <a:t>The upper face (forehead, eyes) can be cropped out before the photo is ever saved, opt-in; this screenshot shows the earlier blur-based safeguard instead.</a:t>
             </a:r>
           </a:p>
         </p:txBody>
@@ -7596,7 +7596,7 @@
                 </a:solidFill>
                 <a:latin typeface="Arial"/>
               </a:rPr>
-              <a:t>An opt-in checkbox crops your face out before saving. Left unchecked, FitML still protects you — your real face is restored over anything the AI drew in its place.</a:t>
+              <a:t>An opt-in checkbox crops the upper face — forehead and eyes — out before saving. Left unchecked, FitML still protects you — your real face is restored over anything the AI drew in its place.</a:t>
             </a:r>
           </a:p>
         </p:txBody>

--- a/submission/Debie_Galleros_Pillar5_CapstoneProject_BusinessDeck.pptx
+++ b/submission/Debie_Galleros_Pillar5_CapstoneProject_BusinessDeck.pptx
@@ -5091,22 +5091,22 @@
       </p:sp>
       <p:pic>
         <p:nvPicPr>
-          <p:cNvPr id="4" name="Picture 3" descr="item_tryon.png"/>
+          <p:cNvPr id="16" name="Picture 15" descr="final_clean.png"/>
           <p:cNvPicPr>
             <a:picLocks noChangeAspect="1"/>
           </p:cNvPicPr>
           <p:nvPr/>
         </p:nvPicPr>
         <p:blipFill>
-          <a:blip r:embed="rId3"/>
+          <a:blip r:embed="rId6"/>
           <a:stretch>
             <a:fillRect/>
           </a:stretch>
         </p:blipFill>
         <p:spPr>
           <a:xfrm>
-            <a:off x="502920" y="1874519"/>
-            <a:ext cx="6766560" cy="4229100"/>
+            <a:off x="1742622" y="1874519"/>
+            <a:ext cx="4287155" cy="4229100"/>
           </a:xfrm>
           <a:prstGeom prst="rect">
             <a:avLst/>
@@ -5121,8 +5121,8 @@
         </p:nvSpPr>
         <p:spPr>
           <a:xfrm>
-            <a:off x="502920" y="1874519"/>
-            <a:ext cx="6766560" cy="4229100"/>
+            <a:off x="1742622" y="1874519"/>
+            <a:ext cx="4287155" cy="4229100"/>
           </a:xfrm>
           <a:prstGeom prst="rect">
             <a:avLst/>
@@ -5278,7 +5278,7 @@
                 </a:solidFill>
                 <a:latin typeface="Arial"/>
               </a:rPr>
-              <a:t>“Recommended size: XS — 40% confidence” — the confidence level is shown, never hidden.</a:t>
+              <a:t>“Recommended size: M — 45% confidence” — the confidence level is shown, never hidden.</a:t>
             </a:r>
           </a:p>
         </p:txBody>
@@ -5362,7 +5362,7 @@
                 </a:solidFill>
                 <a:latin typeface="Arial"/>
               </a:rPr>
-              <a:t>The sweater is placed on the shopper's own photo, scaled and angled to their pose — picking a bigger size renders visibly bigger.</a:t>
+              <a:t>The blouse is placed on the shopper's own photo, scaled and angled to their pose — picking a bigger size renders visibly bigger.</a:t>
             </a:r>
           </a:p>
         </p:txBody>
@@ -5446,7 +5446,7 @@
                 </a:solidFill>
                 <a:latin typeface="Arial"/>
               </a:rPr>
-              <a:t>Plain words, no tailor talk: “the length reaches your waist neatly, and the sleeves land well at your wrists.”</a:t>
+              <a:t>Plain words, no tailor talk: “the short sleeves sit neatly on your arms, and the buttons run straight and even down the front.”</a:t>
             </a:r>
           </a:p>
         </p:txBody>
@@ -5530,7 +5530,7 @@
                 </a:solidFill>
                 <a:latin typeface="Arial"/>
               </a:rPr>
-              <a:t>The upper face (forehead, eyes) can be cropped out before the photo is ever saved, opt-in; this screenshot shows the earlier blur-based safeguard instead.</a:t>
+              <a:t>The upper face (forehead, eyes) can be cropped out before the photo is ever saved, opt-in — shown here live on the current site.</a:t>
             </a:r>
           </a:p>
         </p:txBody>

--- a/submission/Debie_Galleros_Pillar5_CapstoneProject_BusinessDeck.pptx
+++ b/submission/Debie_Galleros_Pillar5_CapstoneProject_BusinessDeck.pptx
@@ -5091,22 +5091,22 @@
       </p:sp>
       <p:pic>
         <p:nvPicPr>
-          <p:cNvPr id="16" name="Picture 15" descr="final_clean.png"/>
+          <p:cNvPr id="16" name="Picture 15" descr="deck_shirt.png"/>
           <p:cNvPicPr>
             <a:picLocks noChangeAspect="1"/>
           </p:cNvPicPr>
           <p:nvPr/>
         </p:nvPicPr>
         <p:blipFill>
-          <a:blip r:embed="rId6"/>
+          <a:blip r:embed="rId7"/>
           <a:stretch>
             <a:fillRect/>
           </a:stretch>
         </p:blipFill>
         <p:spPr>
           <a:xfrm>
-            <a:off x="1742622" y="1874519"/>
-            <a:ext cx="4287155" cy="4229100"/>
+            <a:off x="2300287" y="1874519"/>
+            <a:ext cx="3171825" cy="4229100"/>
           </a:xfrm>
           <a:prstGeom prst="rect">
             <a:avLst/>
@@ -5121,8 +5121,8 @@
         </p:nvSpPr>
         <p:spPr>
           <a:xfrm>
-            <a:off x="1742622" y="1874519"/>
-            <a:ext cx="4287155" cy="4229100"/>
+            <a:off x="2300287" y="1874519"/>
+            <a:ext cx="3171825" cy="4229100"/>
           </a:xfrm>
           <a:prstGeom prst="rect">
             <a:avLst/>
@@ -5278,7 +5278,7 @@
                 </a:solidFill>
                 <a:latin typeface="Arial"/>
               </a:rPr>
-              <a:t>“Recommended size: M — 45% confidence” — the confidence level is shown, never hidden.</a:t>
+              <a:t>“Recommended size: XS — 40% confidence” — the confidence level is shown, never hidden.</a:t>
             </a:r>
           </a:p>
         </p:txBody>
@@ -5362,7 +5362,7 @@
                 </a:solidFill>
                 <a:latin typeface="Arial"/>
               </a:rPr>
-              <a:t>The blouse is placed on the shopper's own photo, scaled and angled to their pose — picking a bigger size renders visibly bigger.</a:t>
+              <a:t>The shirt is placed on the shopper's own photo, scaled and angled to their pose — picking a bigger size renders visibly bigger.</a:t>
             </a:r>
           </a:p>
         </p:txBody>
@@ -5446,7 +5446,7 @@
                 </a:solidFill>
                 <a:latin typeface="Arial"/>
               </a:rPr>
-              <a:t>Plain words, no tailor talk: “the short sleeves sit neatly on your arms, and the buttons run straight and even down the front.”</a:t>
+              <a:t>Plain words, no tailor talk: “the length ends right at your waistband, and the sleeves fall neatly at your wrists.”</a:t>
             </a:r>
           </a:p>
         </p:txBody>
@@ -5530,7 +5530,7 @@
                 </a:solidFill>
                 <a:latin typeface="Arial"/>
               </a:rPr>
-              <a:t>The upper face (forehead, eyes) can be cropped out before the photo is ever saved, opt-in — shown here live on the current site.</a:t>
+              <a:t>The upper face (forehead, eyes) can be cropped out before the photo is ever saved, opt-in; this screenshot shows the default, unchecked state — the real face preserved via paste-back.</a:t>
             </a:r>
           </a:p>
         </p:txBody>
